--- a/topic04-selection/unit-1/talk-2/b-boolean-cond.pptx
+++ b/topic04-selection/unit-1/talk-2/b-boolean-cond.pptx
@@ -499,14 +499,14 @@
           </a:ln>
           <a:extLst>
             <a:ext uri="{909E8E84-426E-40dd-AFC4-6F175D3DCCD1}">
-              <a14:hiddenFill xmlns="" xmlns:a14="http://schemas.microsoft.com/office/drawing/2010/main">
+              <a14:hiddenFill xmlns:a14="http://schemas.microsoft.com/office/drawing/2010/main" xmlns="">
                 <a:solidFill>
                   <a:srgbClr val="FFFFFF"/>
                 </a:solidFill>
               </a14:hiddenFill>
             </a:ext>
             <a:ext uri="{FAA26D3D-D897-4be2-8F04-BA451C77F1D7}">
-              <ma14:placeholderFlag xmlns="" xmlns:ma14="http://schemas.microsoft.com/office/mac/drawingml/2011/main" val="1"/>
+              <ma14:placeholderFlag xmlns:ma14="http://schemas.microsoft.com/office/mac/drawingml/2011/main" xmlns="" val="1"/>
             </a:ext>
           </a:extLst>
         </p:spPr>
@@ -850,14 +850,14 @@
           <a:noFill/>
           <a:extLst>
             <a:ext uri="{909E8E84-426E-40dd-AFC4-6F175D3DCCD1}">
-              <a14:hiddenFill xmlns="" xmlns:a14="http://schemas.microsoft.com/office/drawing/2010/main">
+              <a14:hiddenFill xmlns:a14="http://schemas.microsoft.com/office/drawing/2010/main" xmlns="">
                 <a:solidFill>
                   <a:srgbClr val="FFFFFF"/>
                 </a:solidFill>
               </a14:hiddenFill>
             </a:ext>
             <a:ext uri="{91240B29-F687-4f45-9708-019B960494DF}">
-              <a14:hiddenLine xmlns="" xmlns:a14="http://schemas.microsoft.com/office/drawing/2010/main" w="9525">
+              <a14:hiddenLine xmlns:a14="http://schemas.microsoft.com/office/drawing/2010/main" xmlns="" w="9525">
                 <a:solidFill>
                   <a:srgbClr val="000000"/>
                 </a:solidFill>
@@ -1005,14 +1005,14 @@
           <a:noFill/>
           <a:extLst>
             <a:ext uri="{909E8E84-426E-40dd-AFC4-6F175D3DCCD1}">
-              <a14:hiddenFill xmlns="" xmlns:a14="http://schemas.microsoft.com/office/drawing/2010/main">
+              <a14:hiddenFill xmlns:a14="http://schemas.microsoft.com/office/drawing/2010/main" xmlns="">
                 <a:solidFill>
                   <a:srgbClr val="FFFFFF"/>
                 </a:solidFill>
               </a14:hiddenFill>
             </a:ext>
             <a:ext uri="{91240B29-F687-4f45-9708-019B960494DF}">
-              <a14:hiddenLine xmlns="" xmlns:a14="http://schemas.microsoft.com/office/drawing/2010/main" w="9525">
+              <a14:hiddenLine xmlns:a14="http://schemas.microsoft.com/office/drawing/2010/main" xmlns="" w="9525">
                 <a:solidFill>
                   <a:srgbClr val="000000"/>
                 </a:solidFill>
@@ -1160,14 +1160,14 @@
           <a:noFill/>
           <a:extLst>
             <a:ext uri="{909E8E84-426E-40dd-AFC4-6F175D3DCCD1}">
-              <a14:hiddenFill xmlns="" xmlns:a14="http://schemas.microsoft.com/office/drawing/2010/main">
+              <a14:hiddenFill xmlns:a14="http://schemas.microsoft.com/office/drawing/2010/main" xmlns="">
                 <a:solidFill>
                   <a:srgbClr val="FFFFFF"/>
                 </a:solidFill>
               </a14:hiddenFill>
             </a:ext>
             <a:ext uri="{91240B29-F687-4f45-9708-019B960494DF}">
-              <a14:hiddenLine xmlns="" xmlns:a14="http://schemas.microsoft.com/office/drawing/2010/main" w="9525">
+              <a14:hiddenLine xmlns:a14="http://schemas.microsoft.com/office/drawing/2010/main" xmlns="" w="9525">
                 <a:solidFill>
                   <a:srgbClr val="000000"/>
                 </a:solidFill>
@@ -1339,7 +1339,7 @@
         <p:spPr>
           <a:extLst>
             <a:ext uri="{FAA26D3D-D897-4be2-8F04-BA451C77F1D7}">
-              <ma14:placeholderFlag xmlns="" xmlns:ma14="http://schemas.microsoft.com/office/mac/drawingml/2011/main" val="1"/>
+              <ma14:placeholderFlag xmlns:ma14="http://schemas.microsoft.com/office/mac/drawingml/2011/main" xmlns="" val="1"/>
             </a:ext>
           </a:extLst>
         </p:spPr>
@@ -5369,14 +5369,14 @@
           </a:ln>
           <a:extLst>
             <a:ext uri="{909E8E84-426E-40dd-AFC4-6F175D3DCCD1}">
-              <a14:hiddenFill xmlns="" xmlns:a14="http://schemas.microsoft.com/office/drawing/2010/main">
+              <a14:hiddenFill xmlns:a14="http://schemas.microsoft.com/office/drawing/2010/main" xmlns="">
                 <a:solidFill>
                   <a:srgbClr val="FFFFFF"/>
                 </a:solidFill>
               </a14:hiddenFill>
             </a:ext>
             <a:ext uri="{91240B29-F687-4f45-9708-019B960494DF}">
-              <a14:hiddenLine xmlns="" xmlns:a14="http://schemas.microsoft.com/office/drawing/2010/main" w="9525">
+              <a14:hiddenLine xmlns:a14="http://schemas.microsoft.com/office/drawing/2010/main" xmlns="" w="9525">
                 <a:solidFill>
                   <a:srgbClr val="000000"/>
                 </a:solidFill>
@@ -5735,13 +5735,14 @@
             </a:lvl9pPr>
           </a:lstStyle>
           <a:p>
-            <a:pPr algn="r">
+            <a:pPr marL="0" indent="0" algn="r">
               <a:lnSpc>
                 <a:spcPct val="110000"/>
               </a:lnSpc>
               <a:spcBef>
                 <a:spcPts val="0"/>
               </a:spcBef>
+              <a:buNone/>
             </a:pPr>
             <a:r>
               <a:rPr lang="en-IE" sz="2400" dirty="0"/>
@@ -5749,13 +5750,14 @@
             </a:r>
           </a:p>
           <a:p>
-            <a:pPr algn="r">
+            <a:pPr marL="0" indent="0" algn="r">
               <a:lnSpc>
                 <a:spcPct val="110000"/>
               </a:lnSpc>
               <a:spcBef>
                 <a:spcPts val="0"/>
               </a:spcBef>
+              <a:buNone/>
             </a:pPr>
             <a:r>
               <a:rPr lang="en-IE" sz="2400" dirty="0"/>
